--- a/slides/Chapter 10 - Political Parties (Lecture Deck).pptx
+++ b/slides/Chapter 10 - Political Parties (Lecture Deck).pptx
@@ -2846,7 +2846,7 @@
                 <a:ea typeface="Calibri" pitchFamily="34" charset="-122"/>
                 <a:cs typeface="Calibri" pitchFamily="34" charset="-120"/>
               </a:rPr>
-              <a:t>Support for oil and gas production alongside an all-of-the-above energy stance</a:t>
+              <a:t>Support for oil and gas production and a free-market energy policy that opposes subsidies and mandates, including for renewables</a:t>
             </a:r>
             <a:endParaRPr lang="en-US" sz="1250" dirty="0"/>
           </a:p>
@@ -4084,7 +4084,7 @@
                 <a:ea typeface="Calibri" pitchFamily="34" charset="-122"/>
                 <a:cs typeface="Calibri" pitchFamily="34" charset="-120"/>
               </a:rPr>
-              <a:t>Texas voters choose nominees in March. Texas uses an open primary, so any registered voter may participate in one party's contest.</a:t>
+              <a:t>Texas voters choose nominees in March. Texas has no party registration, so any registered voter may vote in either party's primary, but voting in one party's primary bars that voter from the other party's runoff and conventions that year.</a:t>
             </a:r>
             <a:endParaRPr lang="en-US" sz="1200" dirty="0"/>
           </a:p>
@@ -4444,7 +4444,7 @@
                 <a:ea typeface="Calibri" pitchFamily="34" charset="-122"/>
                 <a:cs typeface="Calibri" pitchFamily="34" charset="-120"/>
               </a:rPr>
-              <a:t>Texas Democrats once used a hybrid in which voters both cast a primary ballot and attended an evening caucus, with delegates allocated from each. It drew national attention in the 2008 presidential race and was criticized as confusing and as favoring voters who could attend an evening meeting. The party abandoned it in 2015.</a:t>
+              <a:t>Texas Democrats once used a hybrid in which voters both cast a primary ballot and attended an evening caucus, with delegates allocated from each. It drew national attention in the 2008 presidential race and was criticized as confusing and as favoring voters who could attend an evening meeting. The Democratic National Committee refused to approve it again in June 2015, and Texas Democrats have allocated all delegates by primary vote since 2016.</a:t>
             </a:r>
             <a:endParaRPr lang="en-US" sz="1250" dirty="0"/>
           </a:p>
@@ -9727,7 +9727,7 @@
                 <a:ea typeface="Cambria" pitchFamily="34" charset="-122"/>
                 <a:cs typeface="Cambria" pitchFamily="34" charset="-120"/>
               </a:rPr>
-              <a:t>1978 to 1994</a:t>
+              <a:t>1978 to 1998</a:t>
             </a:r>
             <a:endParaRPr lang="en-US" sz="2200" dirty="0"/>
           </a:p>
@@ -9811,7 +9811,7 @@
                 <a:ea typeface="Calibri" pitchFamily="34" charset="-122"/>
                 <a:cs typeface="Calibri" pitchFamily="34" charset="-120"/>
               </a:rPr>
-              <a:t>Bill Clements wins the governorship in 1978, the first Republican since Reconstruction. George W. Bush wins in 1994, and Republicans consolidate statewide control.</a:t>
+              <a:t>Bill Clements wins the governorship in 1978, the first Republican since Reconstruction. George W. Bush wins in 1994, the last year any Democrat wins a statewide office; in 1998 Republicans sweep every statewide race, and after the 2002 election they control the governorship and both chambers.</a:t>
             </a:r>
             <a:endParaRPr lang="en-US" sz="1200" dirty="0"/>
           </a:p>
@@ -11701,7 +11701,7 @@
                 <a:ea typeface="Calibri" pitchFamily="34" charset="-122"/>
                 <a:cs typeface="Calibri" pitchFamily="34" charset="-120"/>
               </a:rPr>
-              <a:t>The conventions above are the temporary organization: they meet, act, and dissolve. The permanent organization is the standing structure of precinct chairs, county chairs, and the state executive committee, elected by voters in the primary. Precinct chair races are often uncontested, which means a motivated person can take one with very few votes.</a:t>
+              <a:t>The conventions above are the temporary organization: they meet, act, and dissolve. The permanent organization is the standing structure: precinct chairs and county chairs, elected by voters in the March primary, and the state chair, vice chair, and State Executive Committee, elected by delegates at the state convention. Precinct chair races are often uncontested, which means a motivated person can take one with very few votes.</a:t>
             </a:r>
             <a:endParaRPr lang="en-US" sz="1250" dirty="0"/>
           </a:p>
